--- a/public/videos/repositories/sauna-crowd-alert/sauna-crowd-alert-tech-preview.pptx
+++ b/public/videos/repositories/sauna-crowd-alert/sauna-crowd-alert-tech-preview.pptx
@@ -134,7 +134,7 @@
           <p:cNvPr id="2" name="タイトル 1">
             <a:extLst>
               <a:ext uri="{FF2B5EF4-FFF2-40B4-BE49-F238E27FC236}">
-                <a16:creationId xmlns:a16="http://schemas.microsoft.com/office/drawing/2014/main" id="{BE30495A-D746-D90A-35DD-6BD7E94C1981}"/>
+                <a16:creationId xmlns:a16="http://schemas.microsoft.com/office/drawing/2014/main" id="{DCE4FC6F-48D1-1E9B-B8D7-9D5C209FB106}"/>
               </a:ext>
             </a:extLst>
           </p:cNvPr>
@@ -171,7 +171,7 @@
           <p:cNvPr id="3" name="字幕 2">
             <a:extLst>
               <a:ext uri="{FF2B5EF4-FFF2-40B4-BE49-F238E27FC236}">
-                <a16:creationId xmlns:a16="http://schemas.microsoft.com/office/drawing/2014/main" id="{632950C6-AFCF-11EE-DAA9-82F153A29B0A}"/>
+                <a16:creationId xmlns:a16="http://schemas.microsoft.com/office/drawing/2014/main" id="{52733DA6-7A5F-5988-262B-F470348D9727}"/>
               </a:ext>
             </a:extLst>
           </p:cNvPr>
@@ -241,7 +241,7 @@
           <p:cNvPr id="4" name="日付プレースホルダー 3">
             <a:extLst>
               <a:ext uri="{FF2B5EF4-FFF2-40B4-BE49-F238E27FC236}">
-                <a16:creationId xmlns:a16="http://schemas.microsoft.com/office/drawing/2014/main" id="{001A371B-9383-4293-D4BA-EC9EC0C4A2FD}"/>
+                <a16:creationId xmlns:a16="http://schemas.microsoft.com/office/drawing/2014/main" id="{E3D34FAA-242D-A10F-0D6B-0F9E1C7746BD}"/>
               </a:ext>
             </a:extLst>
           </p:cNvPr>
@@ -257,7 +257,7 @@
           <a:bodyPr/>
           <a:lstStyle/>
           <a:p>
-            <a:fld id="{1C9E3F39-1871-4013-9F55-D9388C8C7155}" type="datetimeFigureOut">
+            <a:fld id="{54B7F87C-4223-4414-80F9-0BFA391AA2AD}" type="datetimeFigureOut">
               <a:rPr kumimoji="1" lang="ja-JP" altLang="en-US" smtClean="0"/>
               <a:t>2026/7/30</a:t>
             </a:fld>
@@ -270,7 +270,7 @@
           <p:cNvPr id="5" name="フッター プレースホルダー 4">
             <a:extLst>
               <a:ext uri="{FF2B5EF4-FFF2-40B4-BE49-F238E27FC236}">
-                <a16:creationId xmlns:a16="http://schemas.microsoft.com/office/drawing/2014/main" id="{6A484AFC-0DEA-A2EF-C561-62A9301B106D}"/>
+                <a16:creationId xmlns:a16="http://schemas.microsoft.com/office/drawing/2014/main" id="{894AD816-5B75-F59B-367B-618AC80F760D}"/>
               </a:ext>
             </a:extLst>
           </p:cNvPr>
@@ -295,7 +295,7 @@
           <p:cNvPr id="6" name="スライド番号プレースホルダー 5">
             <a:extLst>
               <a:ext uri="{FF2B5EF4-FFF2-40B4-BE49-F238E27FC236}">
-                <a16:creationId xmlns:a16="http://schemas.microsoft.com/office/drawing/2014/main" id="{4774AD07-4954-86E0-9206-B0F1F14A6133}"/>
+                <a16:creationId xmlns:a16="http://schemas.microsoft.com/office/drawing/2014/main" id="{B6B759BD-981F-3A07-BF54-20BBEC577588}"/>
               </a:ext>
             </a:extLst>
           </p:cNvPr>
@@ -311,7 +311,7 @@
           <a:bodyPr/>
           <a:lstStyle/>
           <a:p>
-            <a:fld id="{EF3CDE91-1626-472F-A4F7-9A5EE30428AD}" type="slidenum">
+            <a:fld id="{3BEF058B-6CA6-44E0-B795-B83CFCE8CB78}" type="slidenum">
               <a:rPr kumimoji="1" lang="ja-JP" altLang="en-US" smtClean="0"/>
               <a:t>‹#›</a:t>
             </a:fld>
@@ -322,7 +322,7 @@
     </p:spTree>
     <p:extLst>
       <p:ext uri="{BB962C8B-B14F-4D97-AF65-F5344CB8AC3E}">
-        <p14:creationId xmlns:p14="http://schemas.microsoft.com/office/powerpoint/2010/main" val="200435422"/>
+        <p14:creationId xmlns:p14="http://schemas.microsoft.com/office/powerpoint/2010/main" val="789700645"/>
       </p:ext>
     </p:extLst>
   </p:cSld>
@@ -354,7 +354,7 @@
           <p:cNvPr id="2" name="タイトル 1">
             <a:extLst>
               <a:ext uri="{FF2B5EF4-FFF2-40B4-BE49-F238E27FC236}">
-                <a16:creationId xmlns:a16="http://schemas.microsoft.com/office/drawing/2014/main" id="{F591033B-FCA9-F2D6-393C-C6DE5C5C0CDB}"/>
+                <a16:creationId xmlns:a16="http://schemas.microsoft.com/office/drawing/2014/main" id="{114862FE-517A-F1C8-E542-7710570A4880}"/>
               </a:ext>
             </a:extLst>
           </p:cNvPr>
@@ -382,7 +382,7 @@
           <p:cNvPr id="3" name="縦書きテキスト プレースホルダー 2">
             <a:extLst>
               <a:ext uri="{FF2B5EF4-FFF2-40B4-BE49-F238E27FC236}">
-                <a16:creationId xmlns:a16="http://schemas.microsoft.com/office/drawing/2014/main" id="{9A12E7C5-E770-8660-D85B-211D89FFEB46}"/>
+                <a16:creationId xmlns:a16="http://schemas.microsoft.com/office/drawing/2014/main" id="{4D06EA26-94F2-B94E-ED40-4FC22A9E0A01}"/>
               </a:ext>
             </a:extLst>
           </p:cNvPr>
@@ -471,7 +471,7 @@
           <p:cNvPr id="4" name="日付プレースホルダー 3">
             <a:extLst>
               <a:ext uri="{FF2B5EF4-FFF2-40B4-BE49-F238E27FC236}">
-                <a16:creationId xmlns:a16="http://schemas.microsoft.com/office/drawing/2014/main" id="{EA0A749E-C5CD-91BA-10CC-B9FA6F3D3FDE}"/>
+                <a16:creationId xmlns:a16="http://schemas.microsoft.com/office/drawing/2014/main" id="{FA75EA87-165C-5567-271E-91E68132C277}"/>
               </a:ext>
             </a:extLst>
           </p:cNvPr>
@@ -487,7 +487,7 @@
           <a:bodyPr/>
           <a:lstStyle/>
           <a:p>
-            <a:fld id="{1C9E3F39-1871-4013-9F55-D9388C8C7155}" type="datetimeFigureOut">
+            <a:fld id="{54B7F87C-4223-4414-80F9-0BFA391AA2AD}" type="datetimeFigureOut">
               <a:rPr kumimoji="1" lang="ja-JP" altLang="en-US" smtClean="0"/>
               <a:t>2026/7/30</a:t>
             </a:fld>
@@ -500,7 +500,7 @@
           <p:cNvPr id="5" name="フッター プレースホルダー 4">
             <a:extLst>
               <a:ext uri="{FF2B5EF4-FFF2-40B4-BE49-F238E27FC236}">
-                <a16:creationId xmlns:a16="http://schemas.microsoft.com/office/drawing/2014/main" id="{365DA56D-4FFC-8EF9-1DCE-F7F17325CD05}"/>
+                <a16:creationId xmlns:a16="http://schemas.microsoft.com/office/drawing/2014/main" id="{BE0CC924-3889-5D9A-0778-45A8DECC277E}"/>
               </a:ext>
             </a:extLst>
           </p:cNvPr>
@@ -525,7 +525,7 @@
           <p:cNvPr id="6" name="スライド番号プレースホルダー 5">
             <a:extLst>
               <a:ext uri="{FF2B5EF4-FFF2-40B4-BE49-F238E27FC236}">
-                <a16:creationId xmlns:a16="http://schemas.microsoft.com/office/drawing/2014/main" id="{77D82B46-1FE6-85DD-76E2-74C52D606775}"/>
+                <a16:creationId xmlns:a16="http://schemas.microsoft.com/office/drawing/2014/main" id="{19316EE9-3F25-EA29-7CB9-1A84584A6E23}"/>
               </a:ext>
             </a:extLst>
           </p:cNvPr>
@@ -541,7 +541,7 @@
           <a:bodyPr/>
           <a:lstStyle/>
           <a:p>
-            <a:fld id="{EF3CDE91-1626-472F-A4F7-9A5EE30428AD}" type="slidenum">
+            <a:fld id="{3BEF058B-6CA6-44E0-B795-B83CFCE8CB78}" type="slidenum">
               <a:rPr kumimoji="1" lang="ja-JP" altLang="en-US" smtClean="0"/>
               <a:t>‹#›</a:t>
             </a:fld>
@@ -552,7 +552,7 @@
     </p:spTree>
     <p:extLst>
       <p:ext uri="{BB962C8B-B14F-4D97-AF65-F5344CB8AC3E}">
-        <p14:creationId xmlns:p14="http://schemas.microsoft.com/office/powerpoint/2010/main" val="3280916996"/>
+        <p14:creationId xmlns:p14="http://schemas.microsoft.com/office/powerpoint/2010/main" val="3127284352"/>
       </p:ext>
     </p:extLst>
   </p:cSld>
@@ -584,7 +584,7 @@
           <p:cNvPr id="2" name="縦書きタイトル 1">
             <a:extLst>
               <a:ext uri="{FF2B5EF4-FFF2-40B4-BE49-F238E27FC236}">
-                <a16:creationId xmlns:a16="http://schemas.microsoft.com/office/drawing/2014/main" id="{8E86EAC4-9412-0306-4151-6A51004B818C}"/>
+                <a16:creationId xmlns:a16="http://schemas.microsoft.com/office/drawing/2014/main" id="{21DD785B-55E9-9088-5753-28D3C9A42BA6}"/>
               </a:ext>
             </a:extLst>
           </p:cNvPr>
@@ -617,7 +617,7 @@
           <p:cNvPr id="3" name="縦書きテキスト プレースホルダー 2">
             <a:extLst>
               <a:ext uri="{FF2B5EF4-FFF2-40B4-BE49-F238E27FC236}">
-                <a16:creationId xmlns:a16="http://schemas.microsoft.com/office/drawing/2014/main" id="{54224F46-0967-073C-27FA-1D3813F5A221}"/>
+                <a16:creationId xmlns:a16="http://schemas.microsoft.com/office/drawing/2014/main" id="{F4D2F580-D849-9469-8270-3058A8D9F47F}"/>
               </a:ext>
             </a:extLst>
           </p:cNvPr>
@@ -711,7 +711,7 @@
           <p:cNvPr id="4" name="日付プレースホルダー 3">
             <a:extLst>
               <a:ext uri="{FF2B5EF4-FFF2-40B4-BE49-F238E27FC236}">
-                <a16:creationId xmlns:a16="http://schemas.microsoft.com/office/drawing/2014/main" id="{7F985791-0607-8CAD-1B50-8E70A10F69D0}"/>
+                <a16:creationId xmlns:a16="http://schemas.microsoft.com/office/drawing/2014/main" id="{33D7F7A6-A405-24E8-A51F-F857DAFD0133}"/>
               </a:ext>
             </a:extLst>
           </p:cNvPr>
@@ -727,7 +727,7 @@
           <a:bodyPr/>
           <a:lstStyle/>
           <a:p>
-            <a:fld id="{1C9E3F39-1871-4013-9F55-D9388C8C7155}" type="datetimeFigureOut">
+            <a:fld id="{54B7F87C-4223-4414-80F9-0BFA391AA2AD}" type="datetimeFigureOut">
               <a:rPr kumimoji="1" lang="ja-JP" altLang="en-US" smtClean="0"/>
               <a:t>2026/7/30</a:t>
             </a:fld>
@@ -740,7 +740,7 @@
           <p:cNvPr id="5" name="フッター プレースホルダー 4">
             <a:extLst>
               <a:ext uri="{FF2B5EF4-FFF2-40B4-BE49-F238E27FC236}">
-                <a16:creationId xmlns:a16="http://schemas.microsoft.com/office/drawing/2014/main" id="{032EA9D1-5F4F-B30D-A536-C49D0DF136E8}"/>
+                <a16:creationId xmlns:a16="http://schemas.microsoft.com/office/drawing/2014/main" id="{896225A4-56B2-AAF0-5D65-E59FA4EE096D}"/>
               </a:ext>
             </a:extLst>
           </p:cNvPr>
@@ -765,7 +765,7 @@
           <p:cNvPr id="6" name="スライド番号プレースホルダー 5">
             <a:extLst>
               <a:ext uri="{FF2B5EF4-FFF2-40B4-BE49-F238E27FC236}">
-                <a16:creationId xmlns:a16="http://schemas.microsoft.com/office/drawing/2014/main" id="{E817C589-DC17-4632-D2D9-A1FF5408058D}"/>
+                <a16:creationId xmlns:a16="http://schemas.microsoft.com/office/drawing/2014/main" id="{57EB1652-56FA-865F-DB77-71AE2FA35F8B}"/>
               </a:ext>
             </a:extLst>
           </p:cNvPr>
@@ -781,7 +781,7 @@
           <a:bodyPr/>
           <a:lstStyle/>
           <a:p>
-            <a:fld id="{EF3CDE91-1626-472F-A4F7-9A5EE30428AD}" type="slidenum">
+            <a:fld id="{3BEF058B-6CA6-44E0-B795-B83CFCE8CB78}" type="slidenum">
               <a:rPr kumimoji="1" lang="ja-JP" altLang="en-US" smtClean="0"/>
               <a:t>‹#›</a:t>
             </a:fld>
@@ -792,7 +792,7 @@
     </p:spTree>
     <p:extLst>
       <p:ext uri="{BB962C8B-B14F-4D97-AF65-F5344CB8AC3E}">
-        <p14:creationId xmlns:p14="http://schemas.microsoft.com/office/powerpoint/2010/main" val="3966091924"/>
+        <p14:creationId xmlns:p14="http://schemas.microsoft.com/office/powerpoint/2010/main" val="2542361481"/>
       </p:ext>
     </p:extLst>
   </p:cSld>
@@ -824,7 +824,7 @@
           <p:cNvPr id="2" name="タイトル 1">
             <a:extLst>
               <a:ext uri="{FF2B5EF4-FFF2-40B4-BE49-F238E27FC236}">
-                <a16:creationId xmlns:a16="http://schemas.microsoft.com/office/drawing/2014/main" id="{FCB99256-CBE8-B33C-5423-EAF52A28EFC9}"/>
+                <a16:creationId xmlns:a16="http://schemas.microsoft.com/office/drawing/2014/main" id="{772B52A0-F4C3-14CD-0D4A-2633302A66FD}"/>
               </a:ext>
             </a:extLst>
           </p:cNvPr>
@@ -852,7 +852,7 @@
           <p:cNvPr id="3" name="コンテンツ プレースホルダー 2">
             <a:extLst>
               <a:ext uri="{FF2B5EF4-FFF2-40B4-BE49-F238E27FC236}">
-                <a16:creationId xmlns:a16="http://schemas.microsoft.com/office/drawing/2014/main" id="{8F00EB1D-2CE7-25AA-5DEC-CE42F1E5B834}"/>
+                <a16:creationId xmlns:a16="http://schemas.microsoft.com/office/drawing/2014/main" id="{646542B7-6A71-58A0-9733-F1A2AA964F24}"/>
               </a:ext>
             </a:extLst>
           </p:cNvPr>
@@ -941,7 +941,7 @@
           <p:cNvPr id="4" name="日付プレースホルダー 3">
             <a:extLst>
               <a:ext uri="{FF2B5EF4-FFF2-40B4-BE49-F238E27FC236}">
-                <a16:creationId xmlns:a16="http://schemas.microsoft.com/office/drawing/2014/main" id="{7B433757-2B32-2CF0-5793-8BA413C5DE36}"/>
+                <a16:creationId xmlns:a16="http://schemas.microsoft.com/office/drawing/2014/main" id="{EFDAD390-7D52-E104-6ACF-F8F007B1D2B2}"/>
               </a:ext>
             </a:extLst>
           </p:cNvPr>
@@ -957,7 +957,7 @@
           <a:bodyPr/>
           <a:lstStyle/>
           <a:p>
-            <a:fld id="{1C9E3F39-1871-4013-9F55-D9388C8C7155}" type="datetimeFigureOut">
+            <a:fld id="{54B7F87C-4223-4414-80F9-0BFA391AA2AD}" type="datetimeFigureOut">
               <a:rPr kumimoji="1" lang="ja-JP" altLang="en-US" smtClean="0"/>
               <a:t>2026/7/30</a:t>
             </a:fld>
@@ -970,7 +970,7 @@
           <p:cNvPr id="5" name="フッター プレースホルダー 4">
             <a:extLst>
               <a:ext uri="{FF2B5EF4-FFF2-40B4-BE49-F238E27FC236}">
-                <a16:creationId xmlns:a16="http://schemas.microsoft.com/office/drawing/2014/main" id="{E9FA1197-706F-E03F-93F8-537FFCC41E2E}"/>
+                <a16:creationId xmlns:a16="http://schemas.microsoft.com/office/drawing/2014/main" id="{0F6C3CAA-8A19-6514-02F5-1360E63131EC}"/>
               </a:ext>
             </a:extLst>
           </p:cNvPr>
@@ -995,7 +995,7 @@
           <p:cNvPr id="6" name="スライド番号プレースホルダー 5">
             <a:extLst>
               <a:ext uri="{FF2B5EF4-FFF2-40B4-BE49-F238E27FC236}">
-                <a16:creationId xmlns:a16="http://schemas.microsoft.com/office/drawing/2014/main" id="{EF803CA5-A044-9CB7-7F07-82DBA0F5075E}"/>
+                <a16:creationId xmlns:a16="http://schemas.microsoft.com/office/drawing/2014/main" id="{91187951-FAB2-B27A-0A69-DB59582862BD}"/>
               </a:ext>
             </a:extLst>
           </p:cNvPr>
@@ -1011,7 +1011,7 @@
           <a:bodyPr/>
           <a:lstStyle/>
           <a:p>
-            <a:fld id="{EF3CDE91-1626-472F-A4F7-9A5EE30428AD}" type="slidenum">
+            <a:fld id="{3BEF058B-6CA6-44E0-B795-B83CFCE8CB78}" type="slidenum">
               <a:rPr kumimoji="1" lang="ja-JP" altLang="en-US" smtClean="0"/>
               <a:t>‹#›</a:t>
             </a:fld>
@@ -1022,7 +1022,7 @@
     </p:spTree>
     <p:extLst>
       <p:ext uri="{BB962C8B-B14F-4D97-AF65-F5344CB8AC3E}">
-        <p14:creationId xmlns:p14="http://schemas.microsoft.com/office/powerpoint/2010/main" val="3915470539"/>
+        <p14:creationId xmlns:p14="http://schemas.microsoft.com/office/powerpoint/2010/main" val="1072213291"/>
       </p:ext>
     </p:extLst>
   </p:cSld>
@@ -1054,7 +1054,7 @@
           <p:cNvPr id="2" name="タイトル 1">
             <a:extLst>
               <a:ext uri="{FF2B5EF4-FFF2-40B4-BE49-F238E27FC236}">
-                <a16:creationId xmlns:a16="http://schemas.microsoft.com/office/drawing/2014/main" id="{CB464CA9-DE29-9F87-77B7-DB3A7A4861D0}"/>
+                <a16:creationId xmlns:a16="http://schemas.microsoft.com/office/drawing/2014/main" id="{2186EFE3-1617-C67F-A567-C3BDB31134CD}"/>
               </a:ext>
             </a:extLst>
           </p:cNvPr>
@@ -1091,7 +1091,7 @@
           <p:cNvPr id="3" name="テキスト プレースホルダー 2">
             <a:extLst>
               <a:ext uri="{FF2B5EF4-FFF2-40B4-BE49-F238E27FC236}">
-                <a16:creationId xmlns:a16="http://schemas.microsoft.com/office/drawing/2014/main" id="{A54C43AA-A5DD-299F-3C8C-B8CC3F68B0D2}"/>
+                <a16:creationId xmlns:a16="http://schemas.microsoft.com/office/drawing/2014/main" id="{7777560D-DCB3-B551-CC42-121DA4C79472}"/>
               </a:ext>
             </a:extLst>
           </p:cNvPr>
@@ -1216,7 +1216,7 @@
           <p:cNvPr id="4" name="日付プレースホルダー 3">
             <a:extLst>
               <a:ext uri="{FF2B5EF4-FFF2-40B4-BE49-F238E27FC236}">
-                <a16:creationId xmlns:a16="http://schemas.microsoft.com/office/drawing/2014/main" id="{D4D62B0A-3683-F256-E809-FFFCDBA529D5}"/>
+                <a16:creationId xmlns:a16="http://schemas.microsoft.com/office/drawing/2014/main" id="{A8DBF014-151E-6A1A-2180-415F0332D504}"/>
               </a:ext>
             </a:extLst>
           </p:cNvPr>
@@ -1232,7 +1232,7 @@
           <a:bodyPr/>
           <a:lstStyle/>
           <a:p>
-            <a:fld id="{1C9E3F39-1871-4013-9F55-D9388C8C7155}" type="datetimeFigureOut">
+            <a:fld id="{54B7F87C-4223-4414-80F9-0BFA391AA2AD}" type="datetimeFigureOut">
               <a:rPr kumimoji="1" lang="ja-JP" altLang="en-US" smtClean="0"/>
               <a:t>2026/7/30</a:t>
             </a:fld>
@@ -1245,7 +1245,7 @@
           <p:cNvPr id="5" name="フッター プレースホルダー 4">
             <a:extLst>
               <a:ext uri="{FF2B5EF4-FFF2-40B4-BE49-F238E27FC236}">
-                <a16:creationId xmlns:a16="http://schemas.microsoft.com/office/drawing/2014/main" id="{5BE28FC7-5573-3532-6582-098B38DDB36A}"/>
+                <a16:creationId xmlns:a16="http://schemas.microsoft.com/office/drawing/2014/main" id="{D0D4C166-855B-2776-D6B9-B86A2BF57D72}"/>
               </a:ext>
             </a:extLst>
           </p:cNvPr>
@@ -1270,7 +1270,7 @@
           <p:cNvPr id="6" name="スライド番号プレースホルダー 5">
             <a:extLst>
               <a:ext uri="{FF2B5EF4-FFF2-40B4-BE49-F238E27FC236}">
-                <a16:creationId xmlns:a16="http://schemas.microsoft.com/office/drawing/2014/main" id="{6BC43A11-95A4-ACDC-EBE2-E0DA5F2B1600}"/>
+                <a16:creationId xmlns:a16="http://schemas.microsoft.com/office/drawing/2014/main" id="{8398BE1F-59CA-4A09-AE36-A005F2A23A65}"/>
               </a:ext>
             </a:extLst>
           </p:cNvPr>
@@ -1286,7 +1286,7 @@
           <a:bodyPr/>
           <a:lstStyle/>
           <a:p>
-            <a:fld id="{EF3CDE91-1626-472F-A4F7-9A5EE30428AD}" type="slidenum">
+            <a:fld id="{3BEF058B-6CA6-44E0-B795-B83CFCE8CB78}" type="slidenum">
               <a:rPr kumimoji="1" lang="ja-JP" altLang="en-US" smtClean="0"/>
               <a:t>‹#›</a:t>
             </a:fld>
@@ -1297,7 +1297,7 @@
     </p:spTree>
     <p:extLst>
       <p:ext uri="{BB962C8B-B14F-4D97-AF65-F5344CB8AC3E}">
-        <p14:creationId xmlns:p14="http://schemas.microsoft.com/office/powerpoint/2010/main" val="777313256"/>
+        <p14:creationId xmlns:p14="http://schemas.microsoft.com/office/powerpoint/2010/main" val="655814988"/>
       </p:ext>
     </p:extLst>
   </p:cSld>
@@ -1329,7 +1329,7 @@
           <p:cNvPr id="2" name="タイトル 1">
             <a:extLst>
               <a:ext uri="{FF2B5EF4-FFF2-40B4-BE49-F238E27FC236}">
-                <a16:creationId xmlns:a16="http://schemas.microsoft.com/office/drawing/2014/main" id="{3B0C879D-1EA5-ACD4-10CD-80BB9C01CAC9}"/>
+                <a16:creationId xmlns:a16="http://schemas.microsoft.com/office/drawing/2014/main" id="{82E2A6D3-E029-5B04-B469-BDDA983168DC}"/>
               </a:ext>
             </a:extLst>
           </p:cNvPr>
@@ -1357,7 +1357,7 @@
           <p:cNvPr id="3" name="コンテンツ プレースホルダー 2">
             <a:extLst>
               <a:ext uri="{FF2B5EF4-FFF2-40B4-BE49-F238E27FC236}">
-                <a16:creationId xmlns:a16="http://schemas.microsoft.com/office/drawing/2014/main" id="{8CF6161F-D8B7-62D0-90F2-CFA9DBFBB09E}"/>
+                <a16:creationId xmlns:a16="http://schemas.microsoft.com/office/drawing/2014/main" id="{F7EF20BF-F871-2395-DBAD-14DF20933AFA}"/>
               </a:ext>
             </a:extLst>
           </p:cNvPr>
@@ -1451,7 +1451,7 @@
           <p:cNvPr id="4" name="コンテンツ プレースホルダー 3">
             <a:extLst>
               <a:ext uri="{FF2B5EF4-FFF2-40B4-BE49-F238E27FC236}">
-                <a16:creationId xmlns:a16="http://schemas.microsoft.com/office/drawing/2014/main" id="{D1F08812-F351-F335-22D3-A69E76200FE5}"/>
+                <a16:creationId xmlns:a16="http://schemas.microsoft.com/office/drawing/2014/main" id="{5EB3FD57-7FD6-6B11-FC7A-7F21ECB10BBF}"/>
               </a:ext>
             </a:extLst>
           </p:cNvPr>
@@ -1545,7 +1545,7 @@
           <p:cNvPr id="5" name="日付プレースホルダー 4">
             <a:extLst>
               <a:ext uri="{FF2B5EF4-FFF2-40B4-BE49-F238E27FC236}">
-                <a16:creationId xmlns:a16="http://schemas.microsoft.com/office/drawing/2014/main" id="{BED46FA5-AA19-1C16-5622-47E30C82C625}"/>
+                <a16:creationId xmlns:a16="http://schemas.microsoft.com/office/drawing/2014/main" id="{F88D36C3-76BC-3A7F-E005-1B51F41A7113}"/>
               </a:ext>
             </a:extLst>
           </p:cNvPr>
@@ -1561,7 +1561,7 @@
           <a:bodyPr/>
           <a:lstStyle/>
           <a:p>
-            <a:fld id="{1C9E3F39-1871-4013-9F55-D9388C8C7155}" type="datetimeFigureOut">
+            <a:fld id="{54B7F87C-4223-4414-80F9-0BFA391AA2AD}" type="datetimeFigureOut">
               <a:rPr kumimoji="1" lang="ja-JP" altLang="en-US" smtClean="0"/>
               <a:t>2026/7/30</a:t>
             </a:fld>
@@ -1574,7 +1574,7 @@
           <p:cNvPr id="6" name="フッター プレースホルダー 5">
             <a:extLst>
               <a:ext uri="{FF2B5EF4-FFF2-40B4-BE49-F238E27FC236}">
-                <a16:creationId xmlns:a16="http://schemas.microsoft.com/office/drawing/2014/main" id="{78FD0F1B-4C8B-53A3-8049-5ADC12014466}"/>
+                <a16:creationId xmlns:a16="http://schemas.microsoft.com/office/drawing/2014/main" id="{093DD57E-311A-E809-5BF4-8BB59A9D1BC1}"/>
               </a:ext>
             </a:extLst>
           </p:cNvPr>
@@ -1599,7 +1599,7 @@
           <p:cNvPr id="7" name="スライド番号プレースホルダー 6">
             <a:extLst>
               <a:ext uri="{FF2B5EF4-FFF2-40B4-BE49-F238E27FC236}">
-                <a16:creationId xmlns:a16="http://schemas.microsoft.com/office/drawing/2014/main" id="{7E4A08BF-82A2-20E9-25B4-2958746AD252}"/>
+                <a16:creationId xmlns:a16="http://schemas.microsoft.com/office/drawing/2014/main" id="{C9EBDE42-11E6-E705-EC9C-25BE2D4EE3B9}"/>
               </a:ext>
             </a:extLst>
           </p:cNvPr>
@@ -1615,7 +1615,7 @@
           <a:bodyPr/>
           <a:lstStyle/>
           <a:p>
-            <a:fld id="{EF3CDE91-1626-472F-A4F7-9A5EE30428AD}" type="slidenum">
+            <a:fld id="{3BEF058B-6CA6-44E0-B795-B83CFCE8CB78}" type="slidenum">
               <a:rPr kumimoji="1" lang="ja-JP" altLang="en-US" smtClean="0"/>
               <a:t>‹#›</a:t>
             </a:fld>
@@ -1626,7 +1626,7 @@
     </p:spTree>
     <p:extLst>
       <p:ext uri="{BB962C8B-B14F-4D97-AF65-F5344CB8AC3E}">
-        <p14:creationId xmlns:p14="http://schemas.microsoft.com/office/powerpoint/2010/main" val="1865923478"/>
+        <p14:creationId xmlns:p14="http://schemas.microsoft.com/office/powerpoint/2010/main" val="1850758833"/>
       </p:ext>
     </p:extLst>
   </p:cSld>
@@ -1658,7 +1658,7 @@
           <p:cNvPr id="2" name="タイトル 1">
             <a:extLst>
               <a:ext uri="{FF2B5EF4-FFF2-40B4-BE49-F238E27FC236}">
-                <a16:creationId xmlns:a16="http://schemas.microsoft.com/office/drawing/2014/main" id="{3C9C3F18-0306-C353-6B60-F92743A18422}"/>
+                <a16:creationId xmlns:a16="http://schemas.microsoft.com/office/drawing/2014/main" id="{D11522AC-A43F-1AFB-2C2C-D25F687DE3C8}"/>
               </a:ext>
             </a:extLst>
           </p:cNvPr>
@@ -1691,7 +1691,7 @@
           <p:cNvPr id="3" name="テキスト プレースホルダー 2">
             <a:extLst>
               <a:ext uri="{FF2B5EF4-FFF2-40B4-BE49-F238E27FC236}">
-                <a16:creationId xmlns:a16="http://schemas.microsoft.com/office/drawing/2014/main" id="{CAB0232D-618C-38B8-7032-AA122AF4FEDF}"/>
+                <a16:creationId xmlns:a16="http://schemas.microsoft.com/office/drawing/2014/main" id="{8CC66357-D001-6DEC-DA21-9924869B156C}"/>
               </a:ext>
             </a:extLst>
           </p:cNvPr>
@@ -1762,7 +1762,7 @@
           <p:cNvPr id="4" name="コンテンツ プレースホルダー 3">
             <a:extLst>
               <a:ext uri="{FF2B5EF4-FFF2-40B4-BE49-F238E27FC236}">
-                <a16:creationId xmlns:a16="http://schemas.microsoft.com/office/drawing/2014/main" id="{72A0B8C1-D30E-A88E-58BF-BC60F96F2E2A}"/>
+                <a16:creationId xmlns:a16="http://schemas.microsoft.com/office/drawing/2014/main" id="{48863D24-B0E4-AC62-6C63-EB36093988A6}"/>
               </a:ext>
             </a:extLst>
           </p:cNvPr>
@@ -1856,7 +1856,7 @@
           <p:cNvPr id="5" name="テキスト プレースホルダー 4">
             <a:extLst>
               <a:ext uri="{FF2B5EF4-FFF2-40B4-BE49-F238E27FC236}">
-                <a16:creationId xmlns:a16="http://schemas.microsoft.com/office/drawing/2014/main" id="{B1D99175-FACE-7EAA-3986-3268BC610A9C}"/>
+                <a16:creationId xmlns:a16="http://schemas.microsoft.com/office/drawing/2014/main" id="{40AFBB6A-7B37-7437-9FC5-B8D01CF9C32D}"/>
               </a:ext>
             </a:extLst>
           </p:cNvPr>
@@ -1927,7 +1927,7 @@
           <p:cNvPr id="6" name="コンテンツ プレースホルダー 5">
             <a:extLst>
               <a:ext uri="{FF2B5EF4-FFF2-40B4-BE49-F238E27FC236}">
-                <a16:creationId xmlns:a16="http://schemas.microsoft.com/office/drawing/2014/main" id="{B31887AA-215A-F6F5-74DA-DD68946201B0}"/>
+                <a16:creationId xmlns:a16="http://schemas.microsoft.com/office/drawing/2014/main" id="{CA2965C4-7E5A-8C07-663D-67B6A4FE4E9B}"/>
               </a:ext>
             </a:extLst>
           </p:cNvPr>
@@ -2021,7 +2021,7 @@
           <p:cNvPr id="7" name="日付プレースホルダー 6">
             <a:extLst>
               <a:ext uri="{FF2B5EF4-FFF2-40B4-BE49-F238E27FC236}">
-                <a16:creationId xmlns:a16="http://schemas.microsoft.com/office/drawing/2014/main" id="{077728D4-6749-E82F-6E7A-F6B8ABD7BAEF}"/>
+                <a16:creationId xmlns:a16="http://schemas.microsoft.com/office/drawing/2014/main" id="{7FBD925B-FBC7-CE38-A7E7-247E5E456522}"/>
               </a:ext>
             </a:extLst>
           </p:cNvPr>
@@ -2037,7 +2037,7 @@
           <a:bodyPr/>
           <a:lstStyle/>
           <a:p>
-            <a:fld id="{1C9E3F39-1871-4013-9F55-D9388C8C7155}" type="datetimeFigureOut">
+            <a:fld id="{54B7F87C-4223-4414-80F9-0BFA391AA2AD}" type="datetimeFigureOut">
               <a:rPr kumimoji="1" lang="ja-JP" altLang="en-US" smtClean="0"/>
               <a:t>2026/7/30</a:t>
             </a:fld>
@@ -2050,7 +2050,7 @@
           <p:cNvPr id="8" name="フッター プレースホルダー 7">
             <a:extLst>
               <a:ext uri="{FF2B5EF4-FFF2-40B4-BE49-F238E27FC236}">
-                <a16:creationId xmlns:a16="http://schemas.microsoft.com/office/drawing/2014/main" id="{86FB7227-CD61-D7B8-6200-11395C771D89}"/>
+                <a16:creationId xmlns:a16="http://schemas.microsoft.com/office/drawing/2014/main" id="{C7CB2BDB-D4F4-C334-60BB-0D46757AD0A6}"/>
               </a:ext>
             </a:extLst>
           </p:cNvPr>
@@ -2075,7 +2075,7 @@
           <p:cNvPr id="9" name="スライド番号プレースホルダー 8">
             <a:extLst>
               <a:ext uri="{FF2B5EF4-FFF2-40B4-BE49-F238E27FC236}">
-                <a16:creationId xmlns:a16="http://schemas.microsoft.com/office/drawing/2014/main" id="{7974412D-54FF-37F8-6162-A665277C6BF5}"/>
+                <a16:creationId xmlns:a16="http://schemas.microsoft.com/office/drawing/2014/main" id="{DE35CF47-161D-2472-CAA0-81151CA962DF}"/>
               </a:ext>
             </a:extLst>
           </p:cNvPr>
@@ -2091,7 +2091,7 @@
           <a:bodyPr/>
           <a:lstStyle/>
           <a:p>
-            <a:fld id="{EF3CDE91-1626-472F-A4F7-9A5EE30428AD}" type="slidenum">
+            <a:fld id="{3BEF058B-6CA6-44E0-B795-B83CFCE8CB78}" type="slidenum">
               <a:rPr kumimoji="1" lang="ja-JP" altLang="en-US" smtClean="0"/>
               <a:t>‹#›</a:t>
             </a:fld>
@@ -2102,7 +2102,7 @@
     </p:spTree>
     <p:extLst>
       <p:ext uri="{BB962C8B-B14F-4D97-AF65-F5344CB8AC3E}">
-        <p14:creationId xmlns:p14="http://schemas.microsoft.com/office/powerpoint/2010/main" val="3335683545"/>
+        <p14:creationId xmlns:p14="http://schemas.microsoft.com/office/powerpoint/2010/main" val="3768249667"/>
       </p:ext>
     </p:extLst>
   </p:cSld>
@@ -2134,7 +2134,7 @@
           <p:cNvPr id="2" name="タイトル 1">
             <a:extLst>
               <a:ext uri="{FF2B5EF4-FFF2-40B4-BE49-F238E27FC236}">
-                <a16:creationId xmlns:a16="http://schemas.microsoft.com/office/drawing/2014/main" id="{D58BD038-6081-2843-69AE-2DF1460408A4}"/>
+                <a16:creationId xmlns:a16="http://schemas.microsoft.com/office/drawing/2014/main" id="{D2BBB2C5-366C-A926-DA6F-F7D1D58AA5F7}"/>
               </a:ext>
             </a:extLst>
           </p:cNvPr>
@@ -2162,7 +2162,7 @@
           <p:cNvPr id="3" name="日付プレースホルダー 2">
             <a:extLst>
               <a:ext uri="{FF2B5EF4-FFF2-40B4-BE49-F238E27FC236}">
-                <a16:creationId xmlns:a16="http://schemas.microsoft.com/office/drawing/2014/main" id="{FB421B02-0B33-3020-AE31-D5B522005805}"/>
+                <a16:creationId xmlns:a16="http://schemas.microsoft.com/office/drawing/2014/main" id="{D7FE7732-BC0B-CB74-0779-D86AF41DD65B}"/>
               </a:ext>
             </a:extLst>
           </p:cNvPr>
@@ -2178,7 +2178,7 @@
           <a:bodyPr/>
           <a:lstStyle/>
           <a:p>
-            <a:fld id="{1C9E3F39-1871-4013-9F55-D9388C8C7155}" type="datetimeFigureOut">
+            <a:fld id="{54B7F87C-4223-4414-80F9-0BFA391AA2AD}" type="datetimeFigureOut">
               <a:rPr kumimoji="1" lang="ja-JP" altLang="en-US" smtClean="0"/>
               <a:t>2026/7/30</a:t>
             </a:fld>
@@ -2191,7 +2191,7 @@
           <p:cNvPr id="4" name="フッター プレースホルダー 3">
             <a:extLst>
               <a:ext uri="{FF2B5EF4-FFF2-40B4-BE49-F238E27FC236}">
-                <a16:creationId xmlns:a16="http://schemas.microsoft.com/office/drawing/2014/main" id="{F6674169-8412-DABA-8AC8-5F297E41BD00}"/>
+                <a16:creationId xmlns:a16="http://schemas.microsoft.com/office/drawing/2014/main" id="{9F49E2FC-698D-64D4-D246-64D63DD6B218}"/>
               </a:ext>
             </a:extLst>
           </p:cNvPr>
@@ -2216,7 +2216,7 @@
           <p:cNvPr id="5" name="スライド番号プレースホルダー 4">
             <a:extLst>
               <a:ext uri="{FF2B5EF4-FFF2-40B4-BE49-F238E27FC236}">
-                <a16:creationId xmlns:a16="http://schemas.microsoft.com/office/drawing/2014/main" id="{E38926C3-0A93-B297-1A68-CCA760778006}"/>
+                <a16:creationId xmlns:a16="http://schemas.microsoft.com/office/drawing/2014/main" id="{88561AD6-A1F9-6044-C991-535ACF30A8B1}"/>
               </a:ext>
             </a:extLst>
           </p:cNvPr>
@@ -2232,7 +2232,7 @@
           <a:bodyPr/>
           <a:lstStyle/>
           <a:p>
-            <a:fld id="{EF3CDE91-1626-472F-A4F7-9A5EE30428AD}" type="slidenum">
+            <a:fld id="{3BEF058B-6CA6-44E0-B795-B83CFCE8CB78}" type="slidenum">
               <a:rPr kumimoji="1" lang="ja-JP" altLang="en-US" smtClean="0"/>
               <a:t>‹#›</a:t>
             </a:fld>
@@ -2243,7 +2243,7 @@
     </p:spTree>
     <p:extLst>
       <p:ext uri="{BB962C8B-B14F-4D97-AF65-F5344CB8AC3E}">
-        <p14:creationId xmlns:p14="http://schemas.microsoft.com/office/powerpoint/2010/main" val="3843535494"/>
+        <p14:creationId xmlns:p14="http://schemas.microsoft.com/office/powerpoint/2010/main" val="1156399615"/>
       </p:ext>
     </p:extLst>
   </p:cSld>
@@ -2275,7 +2275,7 @@
           <p:cNvPr id="2" name="日付プレースホルダー 1">
             <a:extLst>
               <a:ext uri="{FF2B5EF4-FFF2-40B4-BE49-F238E27FC236}">
-                <a16:creationId xmlns:a16="http://schemas.microsoft.com/office/drawing/2014/main" id="{D7FCAA9B-6057-7AAA-3BD0-250BEEAD2D1F}"/>
+                <a16:creationId xmlns:a16="http://schemas.microsoft.com/office/drawing/2014/main" id="{387516B1-F451-1A26-19EE-40588DD15AC5}"/>
               </a:ext>
             </a:extLst>
           </p:cNvPr>
@@ -2291,7 +2291,7 @@
           <a:bodyPr/>
           <a:lstStyle/>
           <a:p>
-            <a:fld id="{1C9E3F39-1871-4013-9F55-D9388C8C7155}" type="datetimeFigureOut">
+            <a:fld id="{54B7F87C-4223-4414-80F9-0BFA391AA2AD}" type="datetimeFigureOut">
               <a:rPr kumimoji="1" lang="ja-JP" altLang="en-US" smtClean="0"/>
               <a:t>2026/7/30</a:t>
             </a:fld>
@@ -2304,7 +2304,7 @@
           <p:cNvPr id="3" name="フッター プレースホルダー 2">
             <a:extLst>
               <a:ext uri="{FF2B5EF4-FFF2-40B4-BE49-F238E27FC236}">
-                <a16:creationId xmlns:a16="http://schemas.microsoft.com/office/drawing/2014/main" id="{BE0B499A-0723-5F1E-08FC-F1F69F6FC05E}"/>
+                <a16:creationId xmlns:a16="http://schemas.microsoft.com/office/drawing/2014/main" id="{5BA30C43-98D6-02DF-9D33-FD27CD2A0E5B}"/>
               </a:ext>
             </a:extLst>
           </p:cNvPr>
@@ -2329,7 +2329,7 @@
           <p:cNvPr id="4" name="スライド番号プレースホルダー 3">
             <a:extLst>
               <a:ext uri="{FF2B5EF4-FFF2-40B4-BE49-F238E27FC236}">
-                <a16:creationId xmlns:a16="http://schemas.microsoft.com/office/drawing/2014/main" id="{71157FB5-53DD-E129-1D30-342428D24FD2}"/>
+                <a16:creationId xmlns:a16="http://schemas.microsoft.com/office/drawing/2014/main" id="{9603DD65-98A4-2DF9-EAA9-CF8B35F0DE48}"/>
               </a:ext>
             </a:extLst>
           </p:cNvPr>
@@ -2345,7 +2345,7 @@
           <a:bodyPr/>
           <a:lstStyle/>
           <a:p>
-            <a:fld id="{EF3CDE91-1626-472F-A4F7-9A5EE30428AD}" type="slidenum">
+            <a:fld id="{3BEF058B-6CA6-44E0-B795-B83CFCE8CB78}" type="slidenum">
               <a:rPr kumimoji="1" lang="ja-JP" altLang="en-US" smtClean="0"/>
               <a:t>‹#›</a:t>
             </a:fld>
@@ -2356,7 +2356,7 @@
     </p:spTree>
     <p:extLst>
       <p:ext uri="{BB962C8B-B14F-4D97-AF65-F5344CB8AC3E}">
-        <p14:creationId xmlns:p14="http://schemas.microsoft.com/office/powerpoint/2010/main" val="924277764"/>
+        <p14:creationId xmlns:p14="http://schemas.microsoft.com/office/powerpoint/2010/main" val="2356859308"/>
       </p:ext>
     </p:extLst>
   </p:cSld>
@@ -2388,7 +2388,7 @@
           <p:cNvPr id="2" name="タイトル 1">
             <a:extLst>
               <a:ext uri="{FF2B5EF4-FFF2-40B4-BE49-F238E27FC236}">
-                <a16:creationId xmlns:a16="http://schemas.microsoft.com/office/drawing/2014/main" id="{FDD1F0B5-7A73-58B3-2380-F792B10E9078}"/>
+                <a16:creationId xmlns:a16="http://schemas.microsoft.com/office/drawing/2014/main" id="{370653C6-16DF-B49A-BAB5-103D80676B90}"/>
               </a:ext>
             </a:extLst>
           </p:cNvPr>
@@ -2425,7 +2425,7 @@
           <p:cNvPr id="3" name="コンテンツ プレースホルダー 2">
             <a:extLst>
               <a:ext uri="{FF2B5EF4-FFF2-40B4-BE49-F238E27FC236}">
-                <a16:creationId xmlns:a16="http://schemas.microsoft.com/office/drawing/2014/main" id="{D6627D2A-AA78-35F8-EF91-D757FFD681D5}"/>
+                <a16:creationId xmlns:a16="http://schemas.microsoft.com/office/drawing/2014/main" id="{AF8E44F0-CC4D-D37A-0306-2CC3136AE280}"/>
               </a:ext>
             </a:extLst>
           </p:cNvPr>
@@ -2547,7 +2547,7 @@
           <p:cNvPr id="4" name="テキスト プレースホルダー 3">
             <a:extLst>
               <a:ext uri="{FF2B5EF4-FFF2-40B4-BE49-F238E27FC236}">
-                <a16:creationId xmlns:a16="http://schemas.microsoft.com/office/drawing/2014/main" id="{B02C632F-9160-1E66-F7AC-4A1B6C04B325}"/>
+                <a16:creationId xmlns:a16="http://schemas.microsoft.com/office/drawing/2014/main" id="{8377810B-03C4-7314-3C3D-1ECF352A3457}"/>
               </a:ext>
             </a:extLst>
           </p:cNvPr>
@@ -2618,7 +2618,7 @@
           <p:cNvPr id="5" name="日付プレースホルダー 4">
             <a:extLst>
               <a:ext uri="{FF2B5EF4-FFF2-40B4-BE49-F238E27FC236}">
-                <a16:creationId xmlns:a16="http://schemas.microsoft.com/office/drawing/2014/main" id="{F4357AE1-F15F-E4CC-E01C-6324CC993D53}"/>
+                <a16:creationId xmlns:a16="http://schemas.microsoft.com/office/drawing/2014/main" id="{9B160848-1278-254A-94E1-11086E1E854D}"/>
               </a:ext>
             </a:extLst>
           </p:cNvPr>
@@ -2634,7 +2634,7 @@
           <a:bodyPr/>
           <a:lstStyle/>
           <a:p>
-            <a:fld id="{1C9E3F39-1871-4013-9F55-D9388C8C7155}" type="datetimeFigureOut">
+            <a:fld id="{54B7F87C-4223-4414-80F9-0BFA391AA2AD}" type="datetimeFigureOut">
               <a:rPr kumimoji="1" lang="ja-JP" altLang="en-US" smtClean="0"/>
               <a:t>2026/7/30</a:t>
             </a:fld>
@@ -2647,7 +2647,7 @@
           <p:cNvPr id="6" name="フッター プレースホルダー 5">
             <a:extLst>
               <a:ext uri="{FF2B5EF4-FFF2-40B4-BE49-F238E27FC236}">
-                <a16:creationId xmlns:a16="http://schemas.microsoft.com/office/drawing/2014/main" id="{B8C85C16-2C2F-D705-D933-3B309D7ED117}"/>
+                <a16:creationId xmlns:a16="http://schemas.microsoft.com/office/drawing/2014/main" id="{4D497D20-4C89-6F3C-A0EE-DD03CD075A0B}"/>
               </a:ext>
             </a:extLst>
           </p:cNvPr>
@@ -2672,7 +2672,7 @@
           <p:cNvPr id="7" name="スライド番号プレースホルダー 6">
             <a:extLst>
               <a:ext uri="{FF2B5EF4-FFF2-40B4-BE49-F238E27FC236}">
-                <a16:creationId xmlns:a16="http://schemas.microsoft.com/office/drawing/2014/main" id="{AE5B0143-B1F9-A8DE-CECB-779C0A2EF952}"/>
+                <a16:creationId xmlns:a16="http://schemas.microsoft.com/office/drawing/2014/main" id="{D8F80135-D736-44C7-1A10-72EB8897F428}"/>
               </a:ext>
             </a:extLst>
           </p:cNvPr>
@@ -2688,7 +2688,7 @@
           <a:bodyPr/>
           <a:lstStyle/>
           <a:p>
-            <a:fld id="{EF3CDE91-1626-472F-A4F7-9A5EE30428AD}" type="slidenum">
+            <a:fld id="{3BEF058B-6CA6-44E0-B795-B83CFCE8CB78}" type="slidenum">
               <a:rPr kumimoji="1" lang="ja-JP" altLang="en-US" smtClean="0"/>
               <a:t>‹#›</a:t>
             </a:fld>
@@ -2699,7 +2699,7 @@
     </p:spTree>
     <p:extLst>
       <p:ext uri="{BB962C8B-B14F-4D97-AF65-F5344CB8AC3E}">
-        <p14:creationId xmlns:p14="http://schemas.microsoft.com/office/powerpoint/2010/main" val="1226002252"/>
+        <p14:creationId xmlns:p14="http://schemas.microsoft.com/office/powerpoint/2010/main" val="1363421113"/>
       </p:ext>
     </p:extLst>
   </p:cSld>
@@ -2731,7 +2731,7 @@
           <p:cNvPr id="2" name="タイトル 1">
             <a:extLst>
               <a:ext uri="{FF2B5EF4-FFF2-40B4-BE49-F238E27FC236}">
-                <a16:creationId xmlns:a16="http://schemas.microsoft.com/office/drawing/2014/main" id="{6D28F09F-E4DD-4D66-455E-BA5E8C0012E4}"/>
+                <a16:creationId xmlns:a16="http://schemas.microsoft.com/office/drawing/2014/main" id="{92E0AF5F-BD85-7755-9455-7B267A857971}"/>
               </a:ext>
             </a:extLst>
           </p:cNvPr>
@@ -2768,7 +2768,7 @@
           <p:cNvPr id="3" name="図プレースホルダー 2">
             <a:extLst>
               <a:ext uri="{FF2B5EF4-FFF2-40B4-BE49-F238E27FC236}">
-                <a16:creationId xmlns:a16="http://schemas.microsoft.com/office/drawing/2014/main" id="{61C21B93-0701-B59B-3FB9-821B9E546C3F}"/>
+                <a16:creationId xmlns:a16="http://schemas.microsoft.com/office/drawing/2014/main" id="{AFBEA755-57EE-D385-CE9A-9C6F135FC6D8}"/>
               </a:ext>
             </a:extLst>
           </p:cNvPr>
@@ -2835,7 +2835,7 @@
           <p:cNvPr id="4" name="テキスト プレースホルダー 3">
             <a:extLst>
               <a:ext uri="{FF2B5EF4-FFF2-40B4-BE49-F238E27FC236}">
-                <a16:creationId xmlns:a16="http://schemas.microsoft.com/office/drawing/2014/main" id="{777F5639-75C0-254C-0E59-E528C42B1083}"/>
+                <a16:creationId xmlns:a16="http://schemas.microsoft.com/office/drawing/2014/main" id="{24DE3556-3190-D94A-B075-B3FCBA8A9390}"/>
               </a:ext>
             </a:extLst>
           </p:cNvPr>
@@ -2906,7 +2906,7 @@
           <p:cNvPr id="5" name="日付プレースホルダー 4">
             <a:extLst>
               <a:ext uri="{FF2B5EF4-FFF2-40B4-BE49-F238E27FC236}">
-                <a16:creationId xmlns:a16="http://schemas.microsoft.com/office/drawing/2014/main" id="{C565C32D-1903-3752-C586-A44911350657}"/>
+                <a16:creationId xmlns:a16="http://schemas.microsoft.com/office/drawing/2014/main" id="{300CA5FE-C51A-FDFD-85AA-5620A61D5333}"/>
               </a:ext>
             </a:extLst>
           </p:cNvPr>
@@ -2922,7 +2922,7 @@
           <a:bodyPr/>
           <a:lstStyle/>
           <a:p>
-            <a:fld id="{1C9E3F39-1871-4013-9F55-D9388C8C7155}" type="datetimeFigureOut">
+            <a:fld id="{54B7F87C-4223-4414-80F9-0BFA391AA2AD}" type="datetimeFigureOut">
               <a:rPr kumimoji="1" lang="ja-JP" altLang="en-US" smtClean="0"/>
               <a:t>2026/7/30</a:t>
             </a:fld>
@@ -2935,7 +2935,7 @@
           <p:cNvPr id="6" name="フッター プレースホルダー 5">
             <a:extLst>
               <a:ext uri="{FF2B5EF4-FFF2-40B4-BE49-F238E27FC236}">
-                <a16:creationId xmlns:a16="http://schemas.microsoft.com/office/drawing/2014/main" id="{FFD6059D-AE40-1484-05D1-ECCAA60ED71A}"/>
+                <a16:creationId xmlns:a16="http://schemas.microsoft.com/office/drawing/2014/main" id="{83F43C06-8950-A28B-8E95-36DB660729AE}"/>
               </a:ext>
             </a:extLst>
           </p:cNvPr>
@@ -2960,7 +2960,7 @@
           <p:cNvPr id="7" name="スライド番号プレースホルダー 6">
             <a:extLst>
               <a:ext uri="{FF2B5EF4-FFF2-40B4-BE49-F238E27FC236}">
-                <a16:creationId xmlns:a16="http://schemas.microsoft.com/office/drawing/2014/main" id="{88F8D2EB-613C-7C6C-C69E-0F97FEFF6921}"/>
+                <a16:creationId xmlns:a16="http://schemas.microsoft.com/office/drawing/2014/main" id="{F4397873-4579-A262-6251-45F631B96580}"/>
               </a:ext>
             </a:extLst>
           </p:cNvPr>
@@ -2976,7 +2976,7 @@
           <a:bodyPr/>
           <a:lstStyle/>
           <a:p>
-            <a:fld id="{EF3CDE91-1626-472F-A4F7-9A5EE30428AD}" type="slidenum">
+            <a:fld id="{3BEF058B-6CA6-44E0-B795-B83CFCE8CB78}" type="slidenum">
               <a:rPr kumimoji="1" lang="ja-JP" altLang="en-US" smtClean="0"/>
               <a:t>‹#›</a:t>
             </a:fld>
@@ -2987,7 +2987,7 @@
     </p:spTree>
     <p:extLst>
       <p:ext uri="{BB962C8B-B14F-4D97-AF65-F5344CB8AC3E}">
-        <p14:creationId xmlns:p14="http://schemas.microsoft.com/office/powerpoint/2010/main" val="4217203059"/>
+        <p14:creationId xmlns:p14="http://schemas.microsoft.com/office/powerpoint/2010/main" val="2762157475"/>
       </p:ext>
     </p:extLst>
   </p:cSld>
@@ -3024,7 +3024,7 @@
           <p:cNvPr id="2" name="タイトル プレースホルダー 1">
             <a:extLst>
               <a:ext uri="{FF2B5EF4-FFF2-40B4-BE49-F238E27FC236}">
-                <a16:creationId xmlns:a16="http://schemas.microsoft.com/office/drawing/2014/main" id="{336916D6-575C-08CF-F753-665A1F9727B3}"/>
+                <a16:creationId xmlns:a16="http://schemas.microsoft.com/office/drawing/2014/main" id="{C7357EE0-EB7C-BBB4-8B52-1154F5292EE8}"/>
               </a:ext>
             </a:extLst>
           </p:cNvPr>
@@ -3062,7 +3062,7 @@
           <p:cNvPr id="3" name="テキスト プレースホルダー 2">
             <a:extLst>
               <a:ext uri="{FF2B5EF4-FFF2-40B4-BE49-F238E27FC236}">
-                <a16:creationId xmlns:a16="http://schemas.microsoft.com/office/drawing/2014/main" id="{F4FCA286-37A7-B5A4-57A8-FEB93FEE5430}"/>
+                <a16:creationId xmlns:a16="http://schemas.microsoft.com/office/drawing/2014/main" id="{9ADC4B33-4EBB-0995-22BF-2B665E89948A}"/>
               </a:ext>
             </a:extLst>
           </p:cNvPr>
@@ -3161,7 +3161,7 @@
           <p:cNvPr id="4" name="日付プレースホルダー 3">
             <a:extLst>
               <a:ext uri="{FF2B5EF4-FFF2-40B4-BE49-F238E27FC236}">
-                <a16:creationId xmlns:a16="http://schemas.microsoft.com/office/drawing/2014/main" id="{4959C1D1-9477-DFFA-F6D2-5AD48438DFDD}"/>
+                <a16:creationId xmlns:a16="http://schemas.microsoft.com/office/drawing/2014/main" id="{E1D357C6-B901-2DA5-CACE-4889DDC326D9}"/>
               </a:ext>
             </a:extLst>
           </p:cNvPr>
@@ -3195,7 +3195,7 @@
             </a:lvl1pPr>
           </a:lstStyle>
           <a:p>
-            <a:fld id="{1C9E3F39-1871-4013-9F55-D9388C8C7155}" type="datetimeFigureOut">
+            <a:fld id="{54B7F87C-4223-4414-80F9-0BFA391AA2AD}" type="datetimeFigureOut">
               <a:rPr kumimoji="1" lang="ja-JP" altLang="en-US" smtClean="0"/>
               <a:t>2026/7/30</a:t>
             </a:fld>
@@ -3208,7 +3208,7 @@
           <p:cNvPr id="5" name="フッター プレースホルダー 4">
             <a:extLst>
               <a:ext uri="{FF2B5EF4-FFF2-40B4-BE49-F238E27FC236}">
-                <a16:creationId xmlns:a16="http://schemas.microsoft.com/office/drawing/2014/main" id="{422B2F99-C44F-F0DB-296E-CC74D2993AF5}"/>
+                <a16:creationId xmlns:a16="http://schemas.microsoft.com/office/drawing/2014/main" id="{D6D3CCE0-FB50-022D-9D0E-C65EE03CD939}"/>
               </a:ext>
             </a:extLst>
           </p:cNvPr>
@@ -3251,7 +3251,7 @@
           <p:cNvPr id="6" name="スライド番号プレースホルダー 5">
             <a:extLst>
               <a:ext uri="{FF2B5EF4-FFF2-40B4-BE49-F238E27FC236}">
-                <a16:creationId xmlns:a16="http://schemas.microsoft.com/office/drawing/2014/main" id="{C12DE1B7-F48E-8648-D985-38B2B8E0E736}"/>
+                <a16:creationId xmlns:a16="http://schemas.microsoft.com/office/drawing/2014/main" id="{B3F12BDB-E21E-B31E-9EFE-C2C8CFF65DC3}"/>
               </a:ext>
             </a:extLst>
           </p:cNvPr>
@@ -3285,7 +3285,7 @@
             </a:lvl1pPr>
           </a:lstStyle>
           <a:p>
-            <a:fld id="{EF3CDE91-1626-472F-A4F7-9A5EE30428AD}" type="slidenum">
+            <a:fld id="{3BEF058B-6CA6-44E0-B795-B83CFCE8CB78}" type="slidenum">
               <a:rPr kumimoji="1" lang="ja-JP" altLang="en-US" smtClean="0"/>
               <a:t>‹#›</a:t>
             </a:fld>
@@ -3296,7 +3296,7 @@
     </p:spTree>
     <p:extLst>
       <p:ext uri="{BB962C8B-B14F-4D97-AF65-F5344CB8AC3E}">
-        <p14:creationId xmlns:p14="http://schemas.microsoft.com/office/powerpoint/2010/main" val="1405382150"/>
+        <p14:creationId xmlns:p14="http://schemas.microsoft.com/office/powerpoint/2010/main" val="2438577327"/>
       </p:ext>
     </p:extLst>
   </p:cSld>
@@ -3619,7 +3619,7 @@
           <p:cNvPr id="2" name="テキスト ボックス 1">
             <a:extLst>
               <a:ext uri="{FF2B5EF4-FFF2-40B4-BE49-F238E27FC236}">
-                <a16:creationId xmlns:a16="http://schemas.microsoft.com/office/drawing/2014/main" id="{D66D3DE0-F68C-E7C7-DFEE-6D0AA2D520CE}"/>
+                <a16:creationId xmlns:a16="http://schemas.microsoft.com/office/drawing/2014/main" id="{3506F66C-2A91-077F-AB7C-5F93663F93A7}"/>
               </a:ext>
             </a:extLst>
           </p:cNvPr>
@@ -3665,7 +3665,7 @@
           <p:cNvPr id="3" name="テキスト ボックス 2">
             <a:extLst>
               <a:ext uri="{FF2B5EF4-FFF2-40B4-BE49-F238E27FC236}">
-                <a16:creationId xmlns:a16="http://schemas.microsoft.com/office/drawing/2014/main" id="{5F68289D-6130-A23C-C776-CCD808A7DFC1}"/>
+                <a16:creationId xmlns:a16="http://schemas.microsoft.com/office/drawing/2014/main" id="{73099342-7ECC-03BA-DDC4-D3C32180D89B}"/>
               </a:ext>
             </a:extLst>
           </p:cNvPr>
@@ -3714,7 +3714,7 @@
           <p:cNvPr id="4" name="テキスト ボックス 3">
             <a:extLst>
               <a:ext uri="{FF2B5EF4-FFF2-40B4-BE49-F238E27FC236}">
-                <a16:creationId xmlns:a16="http://schemas.microsoft.com/office/drawing/2014/main" id="{1E9E025F-0576-89F2-B806-08FC52340394}"/>
+                <a16:creationId xmlns:a16="http://schemas.microsoft.com/office/drawing/2014/main" id="{B5388A33-A7BA-3E59-08AE-81AABAF1D11B}"/>
               </a:ext>
             </a:extLst>
           </p:cNvPr>
@@ -3754,7 +3754,7 @@
           <p:cNvPr id="5" name="テキスト ボックス 4">
             <a:extLst>
               <a:ext uri="{FF2B5EF4-FFF2-40B4-BE49-F238E27FC236}">
-                <a16:creationId xmlns:a16="http://schemas.microsoft.com/office/drawing/2014/main" id="{78CC2866-C624-A635-2DF7-E529E4119590}"/>
+                <a16:creationId xmlns:a16="http://schemas.microsoft.com/office/drawing/2014/main" id="{7C20C4E7-25CF-97A5-6D0D-C1D5C2B21425}"/>
               </a:ext>
             </a:extLst>
           </p:cNvPr>
@@ -3801,7 +3801,7 @@
             <a:hlinkClick r:id="" action="ppaction://media"/>
             <a:extLst>
               <a:ext uri="{FF2B5EF4-FFF2-40B4-BE49-F238E27FC236}">
-                <a16:creationId xmlns:a16="http://schemas.microsoft.com/office/drawing/2014/main" id="{3222A005-D225-291B-97E4-D9EACE7C7080}"/>
+                <a16:creationId xmlns:a16="http://schemas.microsoft.com/office/drawing/2014/main" id="{88F469E4-EF95-5A19-4BD7-E76EC88586A3}"/>
               </a:ext>
             </a:extLst>
           </p:cNvPr>
@@ -3836,7 +3836,7 @@
     </p:spTree>
     <p:extLst>
       <p:ext uri="{BB962C8B-B14F-4D97-AF65-F5344CB8AC3E}">
-        <p14:creationId xmlns:p14="http://schemas.microsoft.com/office/powerpoint/2010/main" val="4062411980"/>
+        <p14:creationId xmlns:p14="http://schemas.microsoft.com/office/powerpoint/2010/main" val="3413181291"/>
       </p:ext>
     </p:extLst>
   </p:cSld>
@@ -3960,7 +3960,7 @@
           <p:cNvPr id="2" name="テキスト ボックス 1">
             <a:extLst>
               <a:ext uri="{FF2B5EF4-FFF2-40B4-BE49-F238E27FC236}">
-                <a16:creationId xmlns:a16="http://schemas.microsoft.com/office/drawing/2014/main" id="{E9000C0E-3662-301D-A2A8-0805DD483353}"/>
+                <a16:creationId xmlns:a16="http://schemas.microsoft.com/office/drawing/2014/main" id="{40807FBB-C2EC-D8EB-B166-E3F92EF77AA0}"/>
               </a:ext>
             </a:extLst>
           </p:cNvPr>
@@ -4006,7 +4006,7 @@
           <p:cNvPr id="3" name="テキスト ボックス 2">
             <a:extLst>
               <a:ext uri="{FF2B5EF4-FFF2-40B4-BE49-F238E27FC236}">
-                <a16:creationId xmlns:a16="http://schemas.microsoft.com/office/drawing/2014/main" id="{51B088B1-7E03-273F-C74E-36ABAD6D82A3}"/>
+                <a16:creationId xmlns:a16="http://schemas.microsoft.com/office/drawing/2014/main" id="{B15C3BBA-5B81-0C71-26B3-80C56F96333D}"/>
               </a:ext>
             </a:extLst>
           </p:cNvPr>
@@ -4046,7 +4046,7 @@
           <p:cNvPr id="4" name="テキスト ボックス 3">
             <a:extLst>
               <a:ext uri="{FF2B5EF4-FFF2-40B4-BE49-F238E27FC236}">
-                <a16:creationId xmlns:a16="http://schemas.microsoft.com/office/drawing/2014/main" id="{A860E499-C425-5A81-3FAC-5A456D5ADED8}"/>
+                <a16:creationId xmlns:a16="http://schemas.microsoft.com/office/drawing/2014/main" id="{F5028709-6BB1-57AD-75F8-B5C862C9C7A5}"/>
               </a:ext>
             </a:extLst>
           </p:cNvPr>
@@ -4110,7 +4110,7 @@
           <p:cNvPr id="5" name="テキスト ボックス 4">
             <a:extLst>
               <a:ext uri="{FF2B5EF4-FFF2-40B4-BE49-F238E27FC236}">
-                <a16:creationId xmlns:a16="http://schemas.microsoft.com/office/drawing/2014/main" id="{98AA4094-4C38-E85A-73C8-05374F4B1E28}"/>
+                <a16:creationId xmlns:a16="http://schemas.microsoft.com/office/drawing/2014/main" id="{1453D51D-7B0D-5F9E-3F17-B8846015EA02}"/>
               </a:ext>
             </a:extLst>
           </p:cNvPr>
@@ -4157,7 +4157,7 @@
             <a:hlinkClick r:id="" action="ppaction://media"/>
             <a:extLst>
               <a:ext uri="{FF2B5EF4-FFF2-40B4-BE49-F238E27FC236}">
-                <a16:creationId xmlns:a16="http://schemas.microsoft.com/office/drawing/2014/main" id="{76C888D8-F785-D392-BD88-2680D894F307}"/>
+                <a16:creationId xmlns:a16="http://schemas.microsoft.com/office/drawing/2014/main" id="{8CF8C909-68C5-CBCD-F2CE-4005237C4ED9}"/>
               </a:ext>
             </a:extLst>
           </p:cNvPr>
@@ -4192,7 +4192,7 @@
     </p:spTree>
     <p:extLst>
       <p:ext uri="{BB962C8B-B14F-4D97-AF65-F5344CB8AC3E}">
-        <p14:creationId xmlns:p14="http://schemas.microsoft.com/office/powerpoint/2010/main" val="1490124381"/>
+        <p14:creationId xmlns:p14="http://schemas.microsoft.com/office/powerpoint/2010/main" val="1497524604"/>
       </p:ext>
     </p:extLst>
   </p:cSld>
@@ -4316,7 +4316,7 @@
           <p:cNvPr id="2" name="テキスト ボックス 1">
             <a:extLst>
               <a:ext uri="{FF2B5EF4-FFF2-40B4-BE49-F238E27FC236}">
-                <a16:creationId xmlns:a16="http://schemas.microsoft.com/office/drawing/2014/main" id="{7E2A4FF7-611C-3DB5-1229-4018A4932CA6}"/>
+                <a16:creationId xmlns:a16="http://schemas.microsoft.com/office/drawing/2014/main" id="{41E39253-153D-4BF9-A7D5-F9163146885E}"/>
               </a:ext>
             </a:extLst>
           </p:cNvPr>
@@ -4362,7 +4362,7 @@
           <p:cNvPr id="3" name="テキスト ボックス 2">
             <a:extLst>
               <a:ext uri="{FF2B5EF4-FFF2-40B4-BE49-F238E27FC236}">
-                <a16:creationId xmlns:a16="http://schemas.microsoft.com/office/drawing/2014/main" id="{4DDDFDD3-8650-E808-4AFE-CFEF74C3A3AD}"/>
+                <a16:creationId xmlns:a16="http://schemas.microsoft.com/office/drawing/2014/main" id="{124947BE-9898-6E42-963D-969C03884315}"/>
               </a:ext>
             </a:extLst>
           </p:cNvPr>
@@ -4402,7 +4402,7 @@
           <p:cNvPr id="4" name="テキスト ボックス 3">
             <a:extLst>
               <a:ext uri="{FF2B5EF4-FFF2-40B4-BE49-F238E27FC236}">
-                <a16:creationId xmlns:a16="http://schemas.microsoft.com/office/drawing/2014/main" id="{9338CCC7-CE79-4739-2187-B3D2E24F3EEF}"/>
+                <a16:creationId xmlns:a16="http://schemas.microsoft.com/office/drawing/2014/main" id="{C5FC70AB-5A2D-55F6-DCDC-CD1FDA90BE57}"/>
               </a:ext>
             </a:extLst>
           </p:cNvPr>
@@ -4497,7 +4497,7 @@
           <p:cNvPr id="5" name="テキスト ボックス 4">
             <a:extLst>
               <a:ext uri="{FF2B5EF4-FFF2-40B4-BE49-F238E27FC236}">
-                <a16:creationId xmlns:a16="http://schemas.microsoft.com/office/drawing/2014/main" id="{A65BE27A-E194-7B51-0B7C-7E297509CF63}"/>
+                <a16:creationId xmlns:a16="http://schemas.microsoft.com/office/drawing/2014/main" id="{A458A383-732F-7CD8-B158-3B93BCCF2ADB}"/>
               </a:ext>
             </a:extLst>
           </p:cNvPr>
@@ -4544,7 +4544,7 @@
             <a:hlinkClick r:id="" action="ppaction://media"/>
             <a:extLst>
               <a:ext uri="{FF2B5EF4-FFF2-40B4-BE49-F238E27FC236}">
-                <a16:creationId xmlns:a16="http://schemas.microsoft.com/office/drawing/2014/main" id="{301D0655-8C66-33BD-1375-8DDD0C7EB86E}"/>
+                <a16:creationId xmlns:a16="http://schemas.microsoft.com/office/drawing/2014/main" id="{69CDA4E5-3C72-50A7-DD1F-EB62290FFC51}"/>
               </a:ext>
             </a:extLst>
           </p:cNvPr>
@@ -4579,7 +4579,7 @@
     </p:spTree>
     <p:extLst>
       <p:ext uri="{BB962C8B-B14F-4D97-AF65-F5344CB8AC3E}">
-        <p14:creationId xmlns:p14="http://schemas.microsoft.com/office/powerpoint/2010/main" val="4120696990"/>
+        <p14:creationId xmlns:p14="http://schemas.microsoft.com/office/powerpoint/2010/main" val="809993222"/>
       </p:ext>
     </p:extLst>
   </p:cSld>
@@ -4703,7 +4703,7 @@
           <p:cNvPr id="2" name="テキスト ボックス 1">
             <a:extLst>
               <a:ext uri="{FF2B5EF4-FFF2-40B4-BE49-F238E27FC236}">
-                <a16:creationId xmlns:a16="http://schemas.microsoft.com/office/drawing/2014/main" id="{E0402312-DAED-EADF-0620-F248E38B5ACD}"/>
+                <a16:creationId xmlns:a16="http://schemas.microsoft.com/office/drawing/2014/main" id="{2E981A63-BC5E-468F-1F2C-53A278B05572}"/>
               </a:ext>
             </a:extLst>
           </p:cNvPr>
@@ -4749,7 +4749,7 @@
           <p:cNvPr id="3" name="テキスト ボックス 2">
             <a:extLst>
               <a:ext uri="{FF2B5EF4-FFF2-40B4-BE49-F238E27FC236}">
-                <a16:creationId xmlns:a16="http://schemas.microsoft.com/office/drawing/2014/main" id="{77F32232-7CC2-8A33-CC9F-543F5C048B46}"/>
+                <a16:creationId xmlns:a16="http://schemas.microsoft.com/office/drawing/2014/main" id="{4FDCE2D5-706B-E8E7-0019-9EBCC54D1DCA}"/>
               </a:ext>
             </a:extLst>
           </p:cNvPr>
@@ -4789,7 +4789,7 @@
           <p:cNvPr id="4" name="テキスト ボックス 3">
             <a:extLst>
               <a:ext uri="{FF2B5EF4-FFF2-40B4-BE49-F238E27FC236}">
-                <a16:creationId xmlns:a16="http://schemas.microsoft.com/office/drawing/2014/main" id="{955EE974-1982-0052-81C5-A317FC512DDE}"/>
+                <a16:creationId xmlns:a16="http://schemas.microsoft.com/office/drawing/2014/main" id="{6A5996F4-25CC-F5A2-7142-B77F574B02C4}"/>
               </a:ext>
             </a:extLst>
           </p:cNvPr>
@@ -4899,7 +4899,7 @@
           <p:cNvPr id="5" name="テキスト ボックス 4">
             <a:extLst>
               <a:ext uri="{FF2B5EF4-FFF2-40B4-BE49-F238E27FC236}">
-                <a16:creationId xmlns:a16="http://schemas.microsoft.com/office/drawing/2014/main" id="{BF2BF855-0F4D-E8CA-8585-E47E5B85D6A9}"/>
+                <a16:creationId xmlns:a16="http://schemas.microsoft.com/office/drawing/2014/main" id="{23CEB343-5EC9-7615-E1C8-ABC72EF768B2}"/>
               </a:ext>
             </a:extLst>
           </p:cNvPr>
@@ -4946,7 +4946,7 @@
             <a:hlinkClick r:id="" action="ppaction://media"/>
             <a:extLst>
               <a:ext uri="{FF2B5EF4-FFF2-40B4-BE49-F238E27FC236}">
-                <a16:creationId xmlns:a16="http://schemas.microsoft.com/office/drawing/2014/main" id="{EB182C22-6642-32B2-F43F-767AE5AC0D2A}"/>
+                <a16:creationId xmlns:a16="http://schemas.microsoft.com/office/drawing/2014/main" id="{29A5CB59-4712-B993-C004-A41EE2804088}"/>
               </a:ext>
             </a:extLst>
           </p:cNvPr>
@@ -4981,7 +4981,7 @@
     </p:spTree>
     <p:extLst>
       <p:ext uri="{BB962C8B-B14F-4D97-AF65-F5344CB8AC3E}">
-        <p14:creationId xmlns:p14="http://schemas.microsoft.com/office/powerpoint/2010/main" val="330016772"/>
+        <p14:creationId xmlns:p14="http://schemas.microsoft.com/office/powerpoint/2010/main" val="3839974973"/>
       </p:ext>
     </p:extLst>
   </p:cSld>
@@ -5105,7 +5105,7 @@
           <p:cNvPr id="2" name="テキスト ボックス 1">
             <a:extLst>
               <a:ext uri="{FF2B5EF4-FFF2-40B4-BE49-F238E27FC236}">
-                <a16:creationId xmlns:a16="http://schemas.microsoft.com/office/drawing/2014/main" id="{01D2BE9D-5DF8-E865-3662-F9FC7EFE9B74}"/>
+                <a16:creationId xmlns:a16="http://schemas.microsoft.com/office/drawing/2014/main" id="{A1F3A796-9444-DB01-100F-EBA8485E68C9}"/>
               </a:ext>
             </a:extLst>
           </p:cNvPr>
@@ -5151,7 +5151,7 @@
           <p:cNvPr id="3" name="テキスト ボックス 2">
             <a:extLst>
               <a:ext uri="{FF2B5EF4-FFF2-40B4-BE49-F238E27FC236}">
-                <a16:creationId xmlns:a16="http://schemas.microsoft.com/office/drawing/2014/main" id="{C121EB3A-387D-24CB-1BCF-8A2B8E630F0E}"/>
+                <a16:creationId xmlns:a16="http://schemas.microsoft.com/office/drawing/2014/main" id="{0BD624F6-7664-CEFB-A9DE-935EFD777A10}"/>
               </a:ext>
             </a:extLst>
           </p:cNvPr>
@@ -5191,7 +5191,7 @@
           <p:cNvPr id="4" name="テキスト ボックス 3">
             <a:extLst>
               <a:ext uri="{FF2B5EF4-FFF2-40B4-BE49-F238E27FC236}">
-                <a16:creationId xmlns:a16="http://schemas.microsoft.com/office/drawing/2014/main" id="{A2311495-6430-8C98-DD28-D35B41DE5C81}"/>
+                <a16:creationId xmlns:a16="http://schemas.microsoft.com/office/drawing/2014/main" id="{3B1C9525-D197-160B-43A8-3D7BF910183A}"/>
               </a:ext>
             </a:extLst>
           </p:cNvPr>
@@ -5215,20 +5215,14 @@
           <a:lstStyle/>
           <a:p>
             <a:r>
-              <a:rPr kumimoji="1" lang="en-US" altLang="ja-JP" sz="2000">
+              <a:rPr kumimoji="1" lang="ja-JP" altLang="en-US" sz="2000">
                 <a:solidFill>
                   <a:srgbClr val="333333"/>
                 </a:solidFill>
                 <a:latin typeface="Arial" panose="020B0604020202020204" pitchFamily="34" charset="0"/>
               </a:rPr>
-              <a:t>Set confirmed custom domain</a:t>
-            </a:r>
-            <a:endParaRPr kumimoji="1" lang="ja-JP" altLang="en-US" sz="2000">
-              <a:solidFill>
-                <a:srgbClr val="333333"/>
-              </a:solidFill>
-              <a:latin typeface="Arial" panose="020B0604020202020204" pitchFamily="34" charset="0"/>
-            </a:endParaRPr>
+              <a:t>直近のコミットでは、実装の見直しと継続的な改善が行われました。</a:t>
+            </a:r>
           </a:p>
         </p:txBody>
       </p:sp>
@@ -5237,7 +5231,7 @@
           <p:cNvPr id="5" name="テキスト ボックス 4">
             <a:extLst>
               <a:ext uri="{FF2B5EF4-FFF2-40B4-BE49-F238E27FC236}">
-                <a16:creationId xmlns:a16="http://schemas.microsoft.com/office/drawing/2014/main" id="{A94C8E09-E31E-19B8-C338-F7FFB24956E1}"/>
+                <a16:creationId xmlns:a16="http://schemas.microsoft.com/office/drawing/2014/main" id="{1DE18FDA-FCBD-8738-D2D9-D0C452F4EE12}"/>
               </a:ext>
             </a:extLst>
           </p:cNvPr>
@@ -5284,7 +5278,7 @@
             <a:hlinkClick r:id="" action="ppaction://media"/>
             <a:extLst>
               <a:ext uri="{FF2B5EF4-FFF2-40B4-BE49-F238E27FC236}">
-                <a16:creationId xmlns:a16="http://schemas.microsoft.com/office/drawing/2014/main" id="{8E1DC925-C17A-07D5-6800-8E92E921C75F}"/>
+                <a16:creationId xmlns:a16="http://schemas.microsoft.com/office/drawing/2014/main" id="{19174C7F-E8D7-2869-2E3E-B96BBEF3A97C}"/>
               </a:ext>
             </a:extLst>
           </p:cNvPr>
@@ -5319,7 +5313,7 @@
     </p:spTree>
     <p:extLst>
       <p:ext uri="{BB962C8B-B14F-4D97-AF65-F5344CB8AC3E}">
-        <p14:creationId xmlns:p14="http://schemas.microsoft.com/office/powerpoint/2010/main" val="1726364231"/>
+        <p14:creationId xmlns:p14="http://schemas.microsoft.com/office/powerpoint/2010/main" val="3322824861"/>
       </p:ext>
     </p:extLst>
   </p:cSld>
@@ -5362,7 +5356,7 @@
                                   <p:childTnLst>
                                     <p:cmd type="call" cmd="playFrom(0.0)">
                                       <p:cBhvr>
-                                        <p:cTn id="6" dur="6451" fill="hold"/>
+                                        <p:cTn id="6" dur="6076" fill="hold"/>
                                         <p:tgtEl>
                                           <p:spTgt spid="6"/>
                                         </p:tgtEl>
@@ -5443,7 +5437,7 @@
           <p:cNvPr id="2" name="テキスト ボックス 1">
             <a:extLst>
               <a:ext uri="{FF2B5EF4-FFF2-40B4-BE49-F238E27FC236}">
-                <a16:creationId xmlns:a16="http://schemas.microsoft.com/office/drawing/2014/main" id="{DC7157A8-0673-C423-92AF-48CB8A4D01F4}"/>
+                <a16:creationId xmlns:a16="http://schemas.microsoft.com/office/drawing/2014/main" id="{EA0B15DA-AFEE-CF8E-A79D-EE68C7E66E95}"/>
               </a:ext>
             </a:extLst>
           </p:cNvPr>
@@ -5489,7 +5483,7 @@
           <p:cNvPr id="3" name="テキスト ボックス 2">
             <a:extLst>
               <a:ext uri="{FF2B5EF4-FFF2-40B4-BE49-F238E27FC236}">
-                <a16:creationId xmlns:a16="http://schemas.microsoft.com/office/drawing/2014/main" id="{A93E2817-B525-1204-D494-7FD55FBFDEB8}"/>
+                <a16:creationId xmlns:a16="http://schemas.microsoft.com/office/drawing/2014/main" id="{5C13BB1E-807F-E387-9393-12006A8DBD03}"/>
               </a:ext>
             </a:extLst>
           </p:cNvPr>
@@ -5529,7 +5523,7 @@
           <p:cNvPr id="4" name="テキスト ボックス 3">
             <a:extLst>
               <a:ext uri="{FF2B5EF4-FFF2-40B4-BE49-F238E27FC236}">
-                <a16:creationId xmlns:a16="http://schemas.microsoft.com/office/drawing/2014/main" id="{15FAC870-4DCA-C240-301A-F20B4189A098}"/>
+                <a16:creationId xmlns:a16="http://schemas.microsoft.com/office/drawing/2014/main" id="{8F62371C-5388-36E3-5B87-8F416AA1AF80}"/>
               </a:ext>
             </a:extLst>
           </p:cNvPr>
@@ -5594,7 +5588,7 @@
           <p:cNvPr id="5" name="テキスト ボックス 4">
             <a:extLst>
               <a:ext uri="{FF2B5EF4-FFF2-40B4-BE49-F238E27FC236}">
-                <a16:creationId xmlns:a16="http://schemas.microsoft.com/office/drawing/2014/main" id="{3FBB7684-01EB-6705-6656-CFCF1623A163}"/>
+                <a16:creationId xmlns:a16="http://schemas.microsoft.com/office/drawing/2014/main" id="{ACA71A9A-E10B-5781-4377-D3E8DBCDA7F2}"/>
               </a:ext>
             </a:extLst>
           </p:cNvPr>
@@ -5641,7 +5635,7 @@
             <a:hlinkClick r:id="" action="ppaction://media"/>
             <a:extLst>
               <a:ext uri="{FF2B5EF4-FFF2-40B4-BE49-F238E27FC236}">
-                <a16:creationId xmlns:a16="http://schemas.microsoft.com/office/drawing/2014/main" id="{3BA07A44-DF36-126B-8729-5C506E54D7B3}"/>
+                <a16:creationId xmlns:a16="http://schemas.microsoft.com/office/drawing/2014/main" id="{A7857B86-A7E8-C615-5173-5756F9438831}"/>
               </a:ext>
             </a:extLst>
           </p:cNvPr>
@@ -5676,7 +5670,7 @@
     </p:spTree>
     <p:extLst>
       <p:ext uri="{BB962C8B-B14F-4D97-AF65-F5344CB8AC3E}">
-        <p14:creationId xmlns:p14="http://schemas.microsoft.com/office/powerpoint/2010/main" val="608133207"/>
+        <p14:creationId xmlns:p14="http://schemas.microsoft.com/office/powerpoint/2010/main" val="2989912594"/>
       </p:ext>
     </p:extLst>
   </p:cSld>
